--- a/docs/week-9/cen429-week-9-sunum.en.pptx
+++ b/docs/week-9/cen429-week-9-sunum.en.pptx
@@ -39063,40 +39063,30 @@
           </a:p>
         </p:txBody>
       </p:sp>
-      <p:sp>
-        <p:nvSpPr>
-          <p:cNvPr id="7" name="TextBox 6"/>
-          <p:cNvSpPr txBox="1"/>
-          <p:nvPr/>
-        </p:nvSpPr>
-        <p:spPr>
-          <a:xfrm>
-            <a:off x="640080" y="1325880"/>
-            <a:ext cx="10911535" cy="4815078"/>
-          </a:xfrm>
-          <a:prstGeom prst="rect">
-            <a:avLst/>
-          </a:prstGeom>
-          <a:noFill/>
-        </p:spPr>
-        <p:txBody>
-          <a:bodyPr wrap="square" lIns="45720" rIns="45720">
-            <a:spAutoFit/>
-          </a:bodyPr>
-          <a:lstStyle/>
-          <a:p>
-            <a:pPr algn="l"/>
-            <a:r>
-              <a:rPr sz="1900" b="0">
-                <a:solidFill>
-                  <a:srgbClr val="1F2D3A"/>
-                </a:solidFill>
-              </a:rPr>
-              <a:t>&lt;svg viewBox="0 0 900 300" style="width:90%;height:auto;display:block;margin:2px auto" font-family="sans-serif"&gt; &lt;line x1="90" y1="30" x2="90" y2="250" stroke="#555" stroke-width="2"/&gt; &lt;text x="60" y="150" font-size="14" fill="#555" transform="rotate(-90 60 150)" text-anchor="middle"&gt;güç &amp;amp; maliyet →&lt;/text&gt; &lt;g font-size="15" fill="#fff"&gt; &lt;rect x="100" y="215" width="260" height="34" fill="#9ed6d7"/&gt;&lt;text x="115" y="238" fill="#083a3e"&gt;1 · Düzen/Ad (isim, biçim, dize)&lt;/text&gt; &lt;rect x="100" y="173" width="360" height="34" fill="#6ec6c8"/&gt;&lt;text x="115" y="196" fill="#083a3e"&gt;2 · Veri (aritmetik, dizi, sabit gizleme)&lt;/text&gt; &lt;rect x="100" y="131" width="470" height="34" fill="#33a7ab"/&gt;&lt;text x="115" y="154"&gt;3 · Kontrol akışı (düzleştirme, opak yüklem)&lt;/text&gt; &lt;rect x="100" y="89" width="590" height="34" fill="#0a9396"/&gt;&lt;text x="115" y="112"&gt;4 · Önleyici (anti-debug, anti-analiz)&lt;/text&gt; &lt;rect x="100" y="47" width="710" height="34" fill="#006d77"/&gt;&lt;text x="115" y="70"&gt;5 · Sanallaştırma (bytecode + yorumlayıcı) — en güçlü/en pahalı&lt;/text&gt; &lt;/g&gt; &lt;text x="450" y="285" text-anchor="middle" font-size="15" fill="#c0392b"&gt;Güç birliktelikten + çeşitlendirmeden gelir; her aile ölçülmeli. Hiçbiri anahtarı korumaz.&lt;/text&gt; &lt;/svg&gt;</a:t>
-            </a:r>
-          </a:p>
-        </p:txBody>
-      </p:sp>
+      <p:pic>
+        <p:nvPicPr>
+          <p:cNvPr id="7" name="Picture 6" descr="h09-01-bes-aile.png"/>
+          <p:cNvPicPr>
+            <a:picLocks noChangeAspect="1"/>
+          </p:cNvPicPr>
+          <p:nvPr/>
+        </p:nvPicPr>
+        <p:blipFill>
+          <a:blip r:embed="rId3"/>
+          <a:stretch>
+            <a:fillRect/>
+          </a:stretch>
+        </p:blipFill>
+        <p:spPr>
+          <a:xfrm>
+            <a:off x="1833529" y="1325880"/>
+            <a:ext cx="8524636" cy="4320878"/>
+          </a:xfrm>
+          <a:prstGeom prst="rect">
+            <a:avLst/>
+          </a:prstGeom>
+        </p:spPr>
+      </p:pic>
     </p:spTree>
   </p:cSld>
   <p:clrMapOvr>
